--- a/decks/combined-circuits/combined-circuits_ch3_pd-and-resistance.pptx
+++ b/decks/combined-circuits/combined-circuits_ch3_pd-and-resistance.pptx
@@ -122,48 +122,48 @@
   <p:extLst>
     <p:ext uri="{521415D9-36F7-43E2-AB2F-B90AF26B5E84}">
       <p14:sectionLst xmlns:p14="http://schemas.microsoft.com/office/powerpoint/2010/main">
-        <p14:section name="Opening" id="{143bda4f-106e-1086-0196-8b171463ade4}">
+        <p14:section name="Opening" id="{0b5b4ed9-d03e-5d35-97d9-5c128643cee5}">
           <p14:sldIdLst>
             <p14:sldId id="256"/>
           </p14:sldIdLst>
         </p14:section>
-        <p14:section name="Gate" id="{08e760bd-efb3-4da8-fc29-43110865c1b3}">
+        <p14:section name="Gate" id="{93d91d77-9df9-e0da-8122-b447922c47f6}">
           <p14:sldIdLst>
             <p14:sldId id="257"/>
             <p14:sldId id="258"/>
           </p14:sldIdLst>
         </p14:section>
-        <p14:section name="Pre-teach" id="{25213f37-fa94-99fc-444b-9b06f4b63a29}">
+        <p14:section name="Pre-teach" id="{da636106-0587-54c5-e2be-87d8792acaa5}">
           <p14:sldIdLst>
             <p14:sldId id="259"/>
             <p14:sldId id="260"/>
           </p14:sldIdLst>
         </p14:section>
-        <p14:section name="Read-along" id="{e302dbe6-007f-8676-5f12-808362574005}">
+        <p14:section name="Read-along" id="{2daed43e-bc94-48d4-7668-7e6a01115fc3}">
           <p14:sldIdLst>
             <p14:sldId id="261"/>
             <p14:sldId id="262"/>
           </p14:sldIdLst>
         </p14:section>
-        <p14:section name="Teach" id="{d84d51b7-a4e1-161c-8151-e510e49aa3a3}">
+        <p14:section name="Teach" id="{d76f1bab-bfed-1995-6c28-ff6dcc6c2d59}">
           <p14:sldIdLst>
             <p14:sldId id="263"/>
             <p14:sldId id="264"/>
             <p14:sldId id="265"/>
           </p14:sldIdLst>
         </p14:section>
-        <p14:section name="Routes" id="{74524699-91eb-109b-411b-1c98beda8e49}">
+        <p14:section name="Routes" id="{6eb81f1e-bdca-87d3-49b5-e58c356b71d8}">
           <p14:sldIdLst>
             <p14:sldId id="266"/>
             <p14:sldId id="267"/>
           </p14:sldIdLst>
         </p14:section>
-        <p14:section name="Close" id="{5b208c60-ef7e-e447-4d6c-0632db21f473}">
+        <p14:section name="Close" id="{39389dec-40de-29ad-2377-b60be76bca44}">
           <p14:sldIdLst>
             <p14:sldId id="268"/>
           </p14:sldIdLst>
         </p14:section>
-        <p14:section name="Answers" id="{974b6599-7ae7-2fec-7d5b-b1ecea58926a}">
+        <p14:section name="Answers" id="{9d04fb2b-116c-0752-1d6a-d1024bad3193}">
           <p14:sldIdLst>
             <p14:sldId id="269"/>
             <p14:sldId id="270"/>
@@ -1314,7 +1314,7 @@
               <a:rPr lang="en-US" dirty="0"/>
               <a:t>Do now — retrieval. Silent, no notes, no help: recall comes before any support. Give about four minutes.
 1. A current of 2 A flows through a 5 Ω resistor. Calculate the potential difference in volts.  →  10 V
-2. What is the unit of resistance?  →  B   ohm (Ω)
+2. What is the unit of resistance?  →  C   ohm (Ω)
 3. A voltmeter is connected in ___ with the component it measures.  →  parallel
 Circulate: who gets 3/3 (Stretch route), 2/3 (Core), 0–1 (Support)? Use this to route pupils later in the lesson.</a:t>
             </a:r>
@@ -1406,7 +1406,7 @@
               <a:rPr lang="en-US" dirty="0"/>
               <a:t>Answers — pupils mark their own in a different colour, then hands up for 3/3, 2/3, 1/3.
 1. 10 V. V = I R = 2 × 5 = 10 V. Whole-number data, so a whole-number answer.
-2. B   ohm (Ω). Resistance is measured in ohms, Ω.
+2. C   ohm (Ω). Resistance is measured in ohms, Ω.
 3. parallel. A voltmeter goes across the component, in parallel. The ammeter goes in series.
 Say the route each score points to: 3/3 Stretch, 2/3 Core, 0–1 Support. Pupils may choose to move up.</a:t>
             </a:r>
@@ -9028,7 +9028,7 @@
                 <a:ea typeface="Calibri" pitchFamily="34" charset="-122"/>
                 <a:cs typeface="Calibri" pitchFamily="34" charset="-120"/>
               </a:rPr>
-              <a:t>volt (V)</a:t>
+              <a:t>coulomb (C)</a:t>
             </a:r>
             <a:endParaRPr lang="en-US" sz="2400" dirty="0"/>
           </a:p>
@@ -9065,7 +9065,7 @@
                 <a:ea typeface="Calibri" pitchFamily="34" charset="-122"/>
                 <a:cs typeface="Calibri" pitchFamily="34" charset="-120"/>
               </a:rPr>
-              <a:t>ohm (Ω)</a:t>
+              <a:t>ampere (A)</a:t>
             </a:r>
             <a:endParaRPr lang="en-US" sz="2400" dirty="0"/>
           </a:p>
@@ -9102,7 +9102,7 @@
                 <a:ea typeface="Calibri" pitchFamily="34" charset="-122"/>
                 <a:cs typeface="Calibri" pitchFamily="34" charset="-120"/>
               </a:rPr>
-              <a:t>ampere (A)</a:t>
+              <a:t>ohm (Ω)</a:t>
             </a:r>
             <a:endParaRPr lang="en-US" sz="2400" dirty="0"/>
           </a:p>
@@ -9139,7 +9139,7 @@
                 <a:ea typeface="Calibri" pitchFamily="34" charset="-122"/>
                 <a:cs typeface="Calibri" pitchFamily="34" charset="-120"/>
               </a:rPr>
-              <a:t>coulomb (C)</a:t>
+              <a:t>volt (V)</a:t>
             </a:r>
             <a:endParaRPr lang="en-US" sz="2400" dirty="0"/>
           </a:p>
@@ -9988,7 +9988,7 @@
                 <a:ea typeface="Calibri" pitchFamily="34" charset="-122"/>
                 <a:cs typeface="Calibri" pitchFamily="34" charset="-120"/>
               </a:rPr>
-              <a:t>B   ohm (Ω)</a:t>
+              <a:t>C   ohm (Ω)</a:t>
             </a:r>
             <a:endParaRPr lang="en-US" sz="2200" dirty="0"/>
           </a:p>

--- a/decks/combined-circuits/combined-circuits_ch3_pd-and-resistance.pptx
+++ b/decks/combined-circuits/combined-circuits_ch3_pd-and-resistance.pptx
@@ -122,48 +122,48 @@
   <p:extLst>
     <p:ext uri="{521415D9-36F7-43E2-AB2F-B90AF26B5E84}">
       <p14:sectionLst xmlns:p14="http://schemas.microsoft.com/office/powerpoint/2010/main">
-        <p14:section name="Opening" id="{0b5b4ed9-d03e-5d35-97d9-5c128643cee5}">
+        <p14:section name="Opening" id="{1e7c34ce-85c3-3d29-2f39-8626881fb848}">
           <p14:sldIdLst>
             <p14:sldId id="256"/>
           </p14:sldIdLst>
         </p14:section>
-        <p14:section name="Gate" id="{93d91d77-9df9-e0da-8122-b447922c47f6}">
+        <p14:section name="Gate" id="{eb51271e-7c55-bb34-a47c-234edb7ba6bb}">
           <p14:sldIdLst>
             <p14:sldId id="257"/>
             <p14:sldId id="258"/>
           </p14:sldIdLst>
         </p14:section>
-        <p14:section name="Pre-teach" id="{da636106-0587-54c5-e2be-87d8792acaa5}">
+        <p14:section name="Pre-teach" id="{993d7d1d-d668-566e-e4d1-14000355bd7d}">
           <p14:sldIdLst>
             <p14:sldId id="259"/>
             <p14:sldId id="260"/>
           </p14:sldIdLst>
         </p14:section>
-        <p14:section name="Read-along" id="{2daed43e-bc94-48d4-7668-7e6a01115fc3}">
+        <p14:section name="Read-along" id="{6213cd73-8301-f504-09e9-f1eea2d38bad}">
           <p14:sldIdLst>
             <p14:sldId id="261"/>
             <p14:sldId id="262"/>
           </p14:sldIdLst>
         </p14:section>
-        <p14:section name="Teach" id="{d76f1bab-bfed-1995-6c28-ff6dcc6c2d59}">
+        <p14:section name="Teach" id="{6e1b8c40-a0a4-4811-24cc-faf861a8d33b}">
           <p14:sldIdLst>
             <p14:sldId id="263"/>
             <p14:sldId id="264"/>
             <p14:sldId id="265"/>
           </p14:sldIdLst>
         </p14:section>
-        <p14:section name="Routes" id="{6eb81f1e-bdca-87d3-49b5-e58c356b71d8}">
+        <p14:section name="Routes" id="{a0b1d37a-d4c6-7f16-e9e5-4ee46cbeb207}">
           <p14:sldIdLst>
             <p14:sldId id="266"/>
             <p14:sldId id="267"/>
           </p14:sldIdLst>
         </p14:section>
-        <p14:section name="Close" id="{39389dec-40de-29ad-2377-b60be76bca44}">
+        <p14:section name="Close" id="{58ce932e-4ca8-0707-280b-155947271a00}">
           <p14:sldIdLst>
             <p14:sldId id="268"/>
           </p14:sldIdLst>
         </p14:section>
-        <p14:section name="Answers" id="{9d04fb2b-116c-0752-1d6a-d1024bad3193}">
+        <p14:section name="Answers" id="{96ca9161-1a2c-054f-39a0-20e4cba361d3}">
           <p14:sldIdLst>
             <p14:sldId id="269"/>
             <p14:sldId id="270"/>
